--- a/ITEX_logos.pptx
+++ b/ITEX_logos.pptx
@@ -104,6 +104,11 @@
       </a:defRPr>
     </a:lvl9pPr>
   </p:defaultTextStyle>
+  <p:extLst>
+    <p:ext uri="{EFAFB233-063F-42B5-8137-9DF3F51BA10A}">
+      <p15:sldGuideLst xmlns:p15="http://schemas.microsoft.com/office/powerpoint/2012/main"/>
+    </p:ext>
+  </p:extLst>
 </p:presentation>
 </file>
 
@@ -3603,15 +3608,15 @@
                 </a:ext>
               </a:extLst>
             </a:blip>
-            <a:srcRect l="25410" t="65305" r="56477" b="15647"/>
+            <a:srcRect l="24014" t="65305" r="57756" b="15647"/>
             <a:stretch>
               <a:fillRect/>
             </a:stretch>
           </p:blipFill>
           <p:spPr>
             <a:xfrm>
-              <a:off x="392158" y="4281510"/>
-              <a:ext cx="373561" cy="589280"/>
+              <a:off x="396240" y="4230710"/>
+              <a:ext cx="369479" cy="579120"/>
             </a:xfrm>
             <a:prstGeom prst="rect">
               <a:avLst/>
